--- a/projects/lsoa_clustering.pptx
+++ b/projects/lsoa_clustering.pptx
@@ -1236,7 +1236,7 @@
           <a:p>
             <a:fld id="{C93E7697-CAA0-1742-857D-B67FD3D2B4D1}" type="datetimeFigureOut">
               <a:rPr lang="en-US" smtClean="0"/>
-              <a:t>5/1/2026</a:t>
+              <a:t>6/26/2026</a:t>
             </a:fld>
             <a:endParaRPr lang="en-US" dirty="0"/>
           </a:p>
@@ -12639,12 +12639,6 @@
             <a:r>
               <a:rPr lang="en-US" sz="1800" dirty="0"/>
               <a:t>PHM &amp; Insights Team</a:t>
-            </a:r>
-          </a:p>
-          <a:p>
-            <a:r>
-              <a:rPr lang="en-US" sz="1800" b="0" dirty="0"/>
-              <a:t>Anne Summerell, Sarah Hollier, Fiona Thrupp</a:t>
             </a:r>
           </a:p>
           <a:p>
@@ -16924,15 +16918,6 @@
 </file>
 
 <file path=customXml/item2.xml><?xml version="1.0" encoding="utf-8"?>
-<?mso-contentType ?>
-<FormTemplates xmlns="http://schemas.microsoft.com/sharepoint/v3/contenttype/forms">
-  <Display>DocumentLibraryForm</Display>
-  <Edit>DocumentLibraryForm</Edit>
-  <New>DocumentLibraryForm</New>
-</FormTemplates>
-</file>
-
-<file path=customXml/item3.xml><?xml version="1.0" encoding="utf-8"?>
 <p:properties xmlns:p="http://schemas.microsoft.com/office/2006/metadata/properties" xmlns:xsi="http://www.w3.org/2001/XMLSchema-instance" xmlns:pc="http://schemas.microsoft.com/office/infopath/2007/PartnerControls">
   <documentManagement>
     <lcf76f155ced4ddcb4097134ff3c332f xmlns="7de4587a-f391-4d89-a9e7-a8b186aaeaa5">
@@ -16943,6 +16928,15 @@
     <_ip_UnifiedCompliancePolicyProperties xmlns="http://schemas.microsoft.com/sharepoint/v3" xsi:nil="true"/>
   </documentManagement>
 </p:properties>
+</file>
+
+<file path=customXml/item3.xml><?xml version="1.0" encoding="utf-8"?>
+<?mso-contentType ?>
+<FormTemplates xmlns="http://schemas.microsoft.com/sharepoint/v3/contenttype/forms">
+  <Display>DocumentLibraryForm</Display>
+  <Edit>DocumentLibraryForm</Edit>
+  <New>DocumentLibraryForm</New>
+</FormTemplates>
 </file>
 
 <file path=customXml/itemProps1.xml><?xml version="1.0" encoding="utf-8"?>
@@ -16966,14 +16960,6 @@
 </file>
 
 <file path=customXml/itemProps2.xml><?xml version="1.0" encoding="utf-8"?>
-<ds:datastoreItem xmlns:ds="http://schemas.openxmlformats.org/officeDocument/2006/customXml" ds:itemID="{3B5B47CC-B35C-4B2B-96E5-ADE35E9132A6}">
-  <ds:schemaRefs>
-    <ds:schemaRef ds:uri="http://schemas.microsoft.com/sharepoint/v3/contenttype/forms"/>
-  </ds:schemaRefs>
-</ds:datastoreItem>
-</file>
-
-<file path=customXml/itemProps3.xml><?xml version="1.0" encoding="utf-8"?>
 <ds:datastoreItem xmlns:ds="http://schemas.openxmlformats.org/officeDocument/2006/customXml" ds:itemID="{4A3BB7FB-BD89-47DF-9FB1-3F904DBEB2A1}">
   <ds:schemaRefs>
     <ds:schemaRef ds:uri="http://www.w3.org/XML/1998/namespace"/>
@@ -16991,6 +16977,14 @@
 </ds:datastoreItem>
 </file>
 
+<file path=customXml/itemProps3.xml><?xml version="1.0" encoding="utf-8"?>
+<ds:datastoreItem xmlns:ds="http://schemas.openxmlformats.org/officeDocument/2006/customXml" ds:itemID="{3B5B47CC-B35C-4B2B-96E5-ADE35E9132A6}">
+  <ds:schemaRefs>
+    <ds:schemaRef ds:uri="http://schemas.microsoft.com/sharepoint/v3/contenttype/forms"/>
+  </ds:schemaRefs>
+</ds:datastoreItem>
+</file>
+
 <file path=docMetadata/LabelInfo.xml><?xml version="1.0" encoding="utf-8"?>
 <clbl:labelList xmlns:clbl="http://schemas.microsoft.com/office/2020/mipLabelMetadata">
   <clbl:label id="{37c354b2-85b0-47f5-b222-07b48d774ee3}" enabled="0" method="" siteId="{37c354b2-85b0-47f5-b222-07b48d774ee3}" removed="1"/>
